--- a/docs/collateral/seminar-luggage/out/BondEx_Seminar_Final.pptx
+++ b/docs/collateral/seminar-luggage/out/BondEx_Seminar_Final.pptx
@@ -13,6 +13,7 @@
     <p:sldId id="261" r:id="rId13"/>
     <p:sldId id="262" r:id="rId14"/>
     <p:sldId id="263" r:id="rId15"/>
+    <p:sldId id="264" r:id="rId16"/>
   </p:sldIdLst>
   <p:sldSz cx="12192000" cy="6858000" type="screen4x3"/>
   <p:notesSz cx="6858000" cy="9144000"/>
@@ -509,50 +510,30 @@
           <a:lstStyle/>
           <a:p>
             <a:r>
-              <a:t>［1分30秒］混雑を「人」ではなく「荷物の移動」という視点で捉え直してもらい、講演全体の問いを立てる。</a:t>
+              <a:t>［0秒］開始前と司会の紹介中に映しておき、講演のテーマとBondExを覚えてもらう。QRコードから公式サイトへ案内する。</a:t>
             </a:r>
           </a:p>
           <a:p/>
           <a:p>
             <a:r>
-              <a:t>皆さん、こんにちは。BondExの［氏名］です。今日は15分ほど、「荷物」のお話をさせてください。</a:t>
-            </a:r>
-          </a:p>
-          <a:p>
-            <a:r>
-              <a:t>最近、「オーバーツーリズム」という言葉を、本当によく耳にします。観光地が混んでいる。電車が混んでいる。確かにその通りです。</a:t>
-            </a:r>
-          </a:p>
-          <a:p>
-            <a:r>
-              <a:t>ただ、駅で少し立ち止まって眺めてみると、気づくことがあります。旅行者が増えるとき、同時に増えているものがある。――スーツケースです。</a:t>
-            </a:r>
-          </a:p>
-          <a:p>
-            <a:r>
-              <a:t>駅のコンコース、電車の中、バス、観光地の坂道。そこを移動しているのは、人だけではありません。人と一緒に、大量の荷物も移動しているんです。</a:t>
-            </a:r>
-          </a:p>
-          <a:p>
-            <a:r>
-              <a:t>ですから今日は、あえてこう問いかけてみたいと思います。これは「オーバーツーリズム」なのか。それとも、「オーバーラゲッジ」なのか。</a:t>
-            </a:r>
-          </a:p>
-          <a:p>
-            <a:r>
-              <a:t>もちろん「オーバーラゲッジ」は正式な言葉ではありません。今日の問題提起のための言葉です。でも、混雑の一部は「人の混雑」ではなく、「荷物の移動」の問題として捉え直せるのではないか。今日はそこから話を始めます。</a:t>
+              <a:t>（会場が開いたら、開始までこの表紙を映しておく）</a:t>
+            </a:r>
+          </a:p>
+          <a:p>
+            <a:r>
+              <a:t>（司会のご紹介が終わったら一礼し、スライド1へ進めてから挨拶を始める）</a:t>
             </a:r>
           </a:p>
           <a:p/>
           <a:p>
             <a:r>
-              <a:t>◆ 強調：移動しているのは、人だけではありません。</a:t>
+              <a:t>◆ 強調：（読み上げなし）</a:t>
             </a:r>
           </a:p>
           <a:p/>
           <a:p>
             <a:r>
-              <a:t>→ つなぎ：「では、そもそも――人と荷物は、一緒に移動しなければいけないのでしょうか。」と問いかけて次へ。</a:t>
+              <a:t>→ つなぎ：一礼してスライド1へ。「皆さん、こんにちは。」</a:t>
             </a:r>
           </a:p>
         </p:txBody>
@@ -622,55 +603,50 @@
           <a:lstStyle/>
           <a:p>
             <a:r>
-              <a:t>［1分30秒］物流の「能力」は既にある。足りないのは旅行との「つながり」だ、という講演の前提を共有する。</a:t>
+              <a:t>［1分30秒］混雑を「人」ではなく「荷物の移動」という視点で捉え直してもらい、講演全体の問いを立てる。</a:t>
             </a:r>
           </a:p>
           <a:p/>
           <a:p>
             <a:r>
-              <a:t>そもそも、人と荷物は一緒に移動する必要があるのでしょうか。</a:t>
-            </a:r>
-          </a:p>
-          <a:p>
-            <a:r>
-              <a:t>私は、必ずしもそうではないと考えています。</a:t>
-            </a:r>
-          </a:p>
-          <a:p>
-            <a:r>
-              <a:t>日本には、世界でも有数の物流インフラがあります。翌日には全国どこへでも荷物が届く。品質も、時間の正確さも、世界トップクラスです。</a:t>
-            </a:r>
-          </a:p>
-          <a:p>
-            <a:r>
-              <a:t>つまり、荷物を運ぶ「能力」が足りないわけではないんです。</a:t>
-            </a:r>
-          </a:p>
-          <a:p>
-            <a:r>
-              <a:t>例えば私たちは、ネットで買い物をすれば翌日には家に届くことを、当たり前だと思っています。ところが同じ国で、旅行者は20キロ、30キロのスーツケースを自分で引いて、駅の階段を上っている。運ぶ力はすぐそばにあるのに、旅行者には届いていないんです。</a:t>
-            </a:r>
-          </a:p>
-          <a:p>
-            <a:r>
-              <a:t>足りないのは、つながりです。旅行は旅行のサービスとして、物流は物流のサービスとして、それぞれ別々に設計されてきました。旅行者から見ると、物流は確かに「ある」。でも、旅の中には「入っていない」。</a:t>
-            </a:r>
-          </a:p>
-          <a:p>
-            <a:r>
-              <a:t>ですから、新しい配送網をゼロから作る必要はありません。すでにある物流を、旅行体験にどうつなげるか。今日お伝えしたいのは、その一点です。</a:t>
+              <a:t>皆さん、こんにちは。BondExの［氏名］です。今日は15分ほど、「荷物」のお話をさせてください。</a:t>
+            </a:r>
+          </a:p>
+          <a:p>
+            <a:r>
+              <a:t>最近、「オーバーツーリズム」という言葉を、本当によく耳にします。観光地が混んでいる。電車が混んでいる。確かにその通りです。</a:t>
+            </a:r>
+          </a:p>
+          <a:p>
+            <a:r>
+              <a:t>ただ、駅で少し立ち止まって眺めてみると、気づくことがあります。旅行者が増えるとき、同時に増えているものがある。――スーツケースです。</a:t>
+            </a:r>
+          </a:p>
+          <a:p>
+            <a:r>
+              <a:t>駅のコンコース、電車の中、バス、観光地の坂道。そこを移動しているのは、人だけではありません。人と一緒に、大量の荷物も移動しているんです。</a:t>
+            </a:r>
+          </a:p>
+          <a:p>
+            <a:r>
+              <a:t>ですから今日は、あえてこう問いかけてみたいと思います。これは「オーバーツーリズム」なのか。それとも、「オーバーラゲッジ」なのか。</a:t>
+            </a:r>
+          </a:p>
+          <a:p>
+            <a:r>
+              <a:t>もちろん「オーバーラゲッジ」は正式な言葉ではありません。今日の問題提起のための言葉です。でも、混雑の一部は「人の混雑」ではなく、「荷物の移動」の問題として捉え直せるのではないか。今日はそこから話を始めます。</a:t>
             </a:r>
           </a:p>
           <a:p/>
           <a:p>
             <a:r>
-              <a:t>◆ 強調：足りないのは、運ぶ能力ではなく、旅とのつながりです。</a:t>
+              <a:t>◆ 強調：移動しているのは、人だけではありません。</a:t>
             </a:r>
           </a:p>
           <a:p/>
           <a:p>
             <a:r>
-              <a:t>→ つなぎ：「ただ、つなげればすぐに使われるかというと、そう簡単ではありません。ある駅で伺ったお話をご紹介します。」</a:t>
+              <a:t>→ つなぎ：「では、そもそも――人と荷物は、一緒に移動しなければいけないのでしょうか。」と問いかけて次へ。</a:t>
             </a:r>
           </a:p>
         </p:txBody>
@@ -740,60 +716,55 @@
           <a:lstStyle/>
           <a:p>
             <a:r>
-              <a:t>［2分］サービスは置くだけでは使われない。旅行者が荷物について意思決定する「タイミング」が重要だと気づいてもらう。</a:t>
+              <a:t>［1分30秒］物流の「能力」は既にある。足りないのは旅行との「つながり」だ、という講演の前提を共有する。</a:t>
             </a:r>
           </a:p>
           <a:p/>
           <a:p>
             <a:r>
-              <a:t>以前、小田急電鉄の現場の方にお話を伺う機会がありました。</a:t>
-            </a:r>
-          </a:p>
-          <a:p>
-            <a:r>
-              <a:t>ロマンスカーの改札前に、荷物配送のサービスがあった時期があるそうです。ところが、利用はあまり多くなかった、と。</a:t>
-            </a:r>
-          </a:p>
-          <a:p>
-            <a:r>
-              <a:t>理由を伺うと、現場の方がこうおっしゃいました。</a:t>
-            </a:r>
-          </a:p>
-          <a:p>
-            <a:r>
-              <a:t>「駅まで荷物を持って来られた人は、そのまま電車に持っていくんですよ」</a:t>
-            </a:r>
-          </a:p>
-          <a:p>
-            <a:r>
-              <a:t>これは、あくまで現場で伺ったお話で、会社としての正式な見解ではありません。ただ私は、この一言にとても大事なことが詰まっていると感じました。</a:t>
-            </a:r>
-          </a:p>
-          <a:p>
-            <a:r>
-              <a:t>考えてみれば当然なんです。ホテルから駅まで、すでに重いスーツケースを運んできた。ここまで来たら、あとは電車に乗せるだけ。その時点で、旅行者の中では「荷物をどうするか」は、もう決まっているんです。</a:t>
-            </a:r>
-          </a:p>
-          <a:p>
-            <a:r>
-              <a:t>誤解のないように申し上げると、駅のサービスが悪いという話ではありません。お伝えしたいのは、配送サービスは「置くだけ」では使われない、ということです。</a:t>
-            </a:r>
-          </a:p>
-          <a:p>
-            <a:r>
-              <a:t>大事なのは、場所よりもタイミング。旅行者が荷物について意思決定する、その瞬間に物流が組み込まれているかどうか。ここが分かれ目です。</a:t>
+              <a:t>そもそも、人と荷物は一緒に移動する必要があるのでしょうか。</a:t>
+            </a:r>
+          </a:p>
+          <a:p>
+            <a:r>
+              <a:t>私は、必ずしもそうではないと考えています。</a:t>
+            </a:r>
+          </a:p>
+          <a:p>
+            <a:r>
+              <a:t>日本には、世界でも有数の物流インフラがあります。翌日には全国どこへでも荷物が届く。品質も、時間の正確さも、世界トップクラスです。</a:t>
+            </a:r>
+          </a:p>
+          <a:p>
+            <a:r>
+              <a:t>つまり、荷物を運ぶ「能力」が足りないわけではないんです。</a:t>
+            </a:r>
+          </a:p>
+          <a:p>
+            <a:r>
+              <a:t>例えば私たちは、ネットで買い物をすれば翌日には家に届くことを、当たり前だと思っています。ところが同じ国で、旅行者は20キロ、30キロのスーツケースを自分で引いて、駅の階段を上っている。運ぶ力はすぐそばにあるのに、旅行者には届いていないんです。</a:t>
+            </a:r>
+          </a:p>
+          <a:p>
+            <a:r>
+              <a:t>足りないのは、つながりです。旅行は旅行のサービスとして、物流は物流のサービスとして、それぞれ別々に設計されてきました。旅行者から見ると、物流は確かに「ある」。でも、旅の中には「入っていない」。</a:t>
+            </a:r>
+          </a:p>
+          <a:p>
+            <a:r>
+              <a:t>ですから、新しい配送網をゼロから作る必要はありません。すでにある物流を、旅行体験にどうつなげるか。今日お伝えしたいのは、その一点です。</a:t>
             </a:r>
           </a:p>
           <a:p/>
           <a:p>
             <a:r>
-              <a:t>◆ 強調：配送サービスは、置くだけでは使われない。</a:t>
+              <a:t>◆ 強調：足りないのは、運ぶ能力ではなく、旅とのつながりです。</a:t>
             </a:r>
           </a:p>
           <a:p/>
           <a:p>
             <a:r>
-              <a:t>→ つなぎ：「では、旅行者が荷物について意思決定する瞬間とは、いつなのか。一番わかりやすいのが、ホテルです。」</a:t>
+              <a:t>→ つなぎ：「ただ、つなげればすぐに使われるかというと、そう簡単ではありません。ある駅で伺ったお話をご紹介します。」</a:t>
             </a:r>
           </a:p>
         </p:txBody>
@@ -863,55 +834,60 @@
           <a:lstStyle/>
           <a:p>
             <a:r>
-              <a:t>［2分］チェックアウトが荷物を手放す自然な接点であることを示し、図を使ってBondExの役割（既存の物流を旅の動線につなぐ）を30秒で紹介する。</a:t>
+              <a:t>［2分］サービスは置くだけでは使われない。旅行者が荷物について意思決定する「タイミング」が重要だと気づいてもらう。</a:t>
             </a:r>
           </a:p>
           <a:p/>
           <a:p>
             <a:r>
-              <a:t>旅行者が、荷物と一番向き合う場所。それはホテルです。</a:t>
-            </a:r>
-          </a:p>
-          <a:p>
-            <a:r>
-              <a:t>チェックアウトの朝を思い出してみてください。部屋で荷物を広げて、今日使うものだけを取り出して、残りをスーツケースに詰める。旅行中に荷物を整理する時間は、ほとんどこの瞬間しかありません。</a:t>
-            </a:r>
-          </a:p>
-          <a:p>
-            <a:r>
-              <a:t>このタイミングで、フロントの方から「このスーツケースは、次のホテルにお送りしておきますね」と言ってもらえたら、どうでしょう。旅行者はその日一日を、身軽に過ごせます。駅の階段も、観光地の坂道も、もう苦になりません。</a:t>
-            </a:r>
-          </a:p>
-          <a:p>
-            <a:r>
-              <a:t>これは、単に「楽になる」というだけではありません。チェックアウトしてから夕方まで、手ぶらで美術館にも、レストランにも、買い物にも行ける。旅程の選択肢そのものが広がるんです。</a:t>
-            </a:r>
-          </a:p>
-          <a:p>
-            <a:r>
-              <a:t>私たちBondExは、まさにここから始めています。ホテルからホテルへの、スーツケース配送です。</a:t>
-            </a:r>
-          </a:p>
-          <a:p>
-            <a:r>
-              <a:t>（図の左の点を指して）チェックアウトのときに、ホテルで荷物を預ける。人は上の点線のように、身軽に観光へ。荷物は下のオレンジの線、今ある物流で、次のホテルへ先回りします。（右の点を指して）夕方、次のホテルに着くと、荷物はもう届いている。旅行会社やDMCの皆さんからご依頼をいただいて、既存の物流ネットワークを使って配送を手配しています。新しく配送網を作っているのではなく、今ある物流を、旅の動線に合わせてつないでいる。それが私たちの役割です。</a:t>
-            </a:r>
-          </a:p>
-          <a:p>
-            <a:r>
-              <a:t>荷物を手放す場所を、旅の中に用意する。これがBondExの出発点です。</a:t>
+              <a:t>以前、小田急電鉄の現場の方にお話を伺う機会がありました。</a:t>
+            </a:r>
+          </a:p>
+          <a:p>
+            <a:r>
+              <a:t>ロマンスカーの改札前に、荷物配送のサービスがあった時期があるそうです。ところが、利用はあまり多くなかった、と。</a:t>
+            </a:r>
+          </a:p>
+          <a:p>
+            <a:r>
+              <a:t>理由を伺うと、現場の方がこうおっしゃいました。</a:t>
+            </a:r>
+          </a:p>
+          <a:p>
+            <a:r>
+              <a:t>「駅まで荷物を持って来られた人は、そのまま電車に持っていくんですよ」</a:t>
+            </a:r>
+          </a:p>
+          <a:p>
+            <a:r>
+              <a:t>これは、あくまで現場で伺ったお話で、会社としての正式な見解ではありません。ただ私は、この一言にとても大事なことが詰まっていると感じました。</a:t>
+            </a:r>
+          </a:p>
+          <a:p>
+            <a:r>
+              <a:t>考えてみれば当然なんです。ホテルから駅まで、すでに重いスーツケースを運んできた。ここまで来たら、あとは電車に乗せるだけ。その時点で、旅行者の中では「荷物をどうするか」は、もう決まっているんです。</a:t>
+            </a:r>
+          </a:p>
+          <a:p>
+            <a:r>
+              <a:t>誤解のないように申し上げると、駅のサービスが悪いという話ではありません。お伝えしたいのは、配送サービスは「置くだけ」では使われない、ということです。</a:t>
+            </a:r>
+          </a:p>
+          <a:p>
+            <a:r>
+              <a:t>大事なのは、場所よりもタイミング。旅行者が荷物について意思決定する、その瞬間に物流が組み込まれているかどうか。ここが分かれ目です。</a:t>
             </a:r>
           </a:p>
           <a:p/>
           <a:p>
             <a:r>
-              <a:t>◆ 強調：荷物を手放す場所を、旅の中に。</a:t>
+              <a:t>◆ 強調：配送サービスは、置くだけでは使われない。</a:t>
             </a:r>
           </a:p>
           <a:p/>
           <a:p>
             <a:r>
-              <a:t>→ つなぎ：「ここまでは、旅の『不便』のお話でした。ですが、荷物の問題は不便だけでは終わりません。私自身の体験をお話しさせてください。」</a:t>
+              <a:t>→ つなぎ：「では、旅行者が荷物について意思決定する瞬間とは、いつなのか。一番わかりやすいのが、ホテルです。」</a:t>
             </a:r>
           </a:p>
         </p:txBody>
@@ -981,60 +957,55 @@
           <a:lstStyle/>
           <a:p>
             <a:r>
-              <a:t>［2分］荷物を持ちたくない心理が、旅行の不便だけでなく購買機会の損失につながっていることを、実体験で実感してもらう。</a:t>
+              <a:t>［2分］チェックアウトが荷物を手放す自然な接点であることを示し、図を使ってBondExの役割（既存の物流を旅の動線につなぐ）を30秒で紹介する。</a:t>
             </a:r>
           </a:p>
           <a:p/>
           <a:p>
             <a:r>
-              <a:t>先日、友人とPARCOで買い物をしていたときのことです。</a:t>
-            </a:r>
-          </a:p>
-          <a:p>
-            <a:r>
-              <a:t>友人が、とても気に入った商品を見つけました。手に取って、鏡の前で合わせてみて、明らかに欲しそうにしている。</a:t>
-            </a:r>
-          </a:p>
-          <a:p>
-            <a:r>
-              <a:t>ところが、少し考えてから、「やっぱり、やめておこうかな」と言うんです。</a:t>
-            </a:r>
-          </a:p>
-          <a:p>
-            <a:r>
-              <a:t>理由を聞くと、「このあと会食があるから、これを持って移動したくない」と。</a:t>
-            </a:r>
-          </a:p>
-          <a:p>
-            <a:r>
-              <a:t>これは、とても象徴的だと思いました。商品が気に入らなかったわけではない。値段で迷ったわけでもない。ただ、「持ちたくない」。それだけで、買い物が止まりかけていたんです。</a:t>
-            </a:r>
-          </a:p>
-          <a:p>
-            <a:r>
-              <a:t>訪日旅行者であれば、なおさらです。このあとも観光が続く。食事の予約もある。ホテルに戻る時間もない。大きな買い物袋を持って歩き回るのは、誰だって避けたいですよね。</a:t>
-            </a:r>
-          </a:p>
-          <a:p>
-            <a:r>
-              <a:t>皆さんの施設でも、同じことが毎日起きているかもしれません。売り場で手に取られたのに、レジまで来なかった商品。その中には、「持ちたくない」という理由で諦められたものが、きっと含まれているはずです。しかもそれは、売上のデータには残りません。買わなかった理由は、どこにも記録されないからです。</a:t>
-            </a:r>
-          </a:p>
-          <a:p>
-            <a:r>
-              <a:t>つまり、荷物を持ちたくないという気持ちは、旅行の不便であると同時に、「購買機会の損失」でもあるんです。</a:t>
+              <a:t>旅行者が、荷物と一番向き合う場所。それはホテルです。</a:t>
+            </a:r>
+          </a:p>
+          <a:p>
+            <a:r>
+              <a:t>チェックアウトの朝を思い出してみてください。部屋で荷物を広げて、今日使うものだけを取り出して、残りをスーツケースに詰める。旅行中に荷物を整理する時間は、ほとんどこの瞬間しかありません。</a:t>
+            </a:r>
+          </a:p>
+          <a:p>
+            <a:r>
+              <a:t>このタイミングで、フロントの方から「このスーツケースは、次のホテルにお送りしておきますね」と言ってもらえたら、どうでしょう。旅行者はその日一日を、身軽に過ごせます。駅の階段も、観光地の坂道も、もう苦になりません。</a:t>
+            </a:r>
+          </a:p>
+          <a:p>
+            <a:r>
+              <a:t>これは、単に「楽になる」というだけではありません。チェックアウトしてから夕方まで、手ぶらで美術館にも、レストランにも、買い物にも行ける。旅程の選択肢そのものが広がるんです。</a:t>
+            </a:r>
+          </a:p>
+          <a:p>
+            <a:r>
+              <a:t>私たちBondExは、まさにここから始めています。ホテルからホテルへの、スーツケース配送です。</a:t>
+            </a:r>
+          </a:p>
+          <a:p>
+            <a:r>
+              <a:t>（図の左の点を指して）チェックアウトのときに、ホテルで荷物を預ける。人は上の点線のように、身軽に観光へ。荷物は下のオレンジの線、今ある物流で、次のホテルへ先回りします。（右の点を指して）夕方、次のホテルに着くと、荷物はもう届いている。旅行会社やDMCの皆さんからご依頼をいただいて、既存の物流ネットワークを使って配送を手配しています。新しく配送網を作っているのではなく、今ある物流を、旅の動線に合わせてつないでいる。それが私たちの役割です。</a:t>
+            </a:r>
+          </a:p>
+          <a:p>
+            <a:r>
+              <a:t>荷物を手放す場所を、旅の中に用意する。これがBondExの出発点です。</a:t>
             </a:r>
           </a:p>
           <a:p/>
           <a:p>
             <a:r>
-              <a:t>◆ 強調：欲しくないのではない。持ちたくないだけ。</a:t>
+              <a:t>◆ 強調：荷物を手放す場所を、旅の中に。</a:t>
             </a:r>
           </a:p>
           <a:p/>
           <a:p>
             <a:r>
-              <a:t>→ つなぎ：金額にはまだ触れない。「では、そのとき私が友人に何を伝えたか。」と一拍おいて次へ。</a:t>
+              <a:t>→ つなぎ：「ここまでは、旅の『不便』のお話でした。ですが、荷物の問題は不便だけでは終わりません。私自身の体験をお話しさせてください。」</a:t>
             </a:r>
           </a:p>
         </p:txBody>
@@ -1104,65 +1075,60 @@
           <a:lstStyle/>
           <a:p>
             <a:r>
-              <a:t>［1分30秒］物流を購入体験に組み込むと購買を後押しできる可能性を、1件の実体験として誠実に示す。講演の転換点。</a:t>
+              <a:t>［2分］荷物を持ちたくない心理が、旅行の不便だけでなく購買機会の損失につながっていることを、実体験で実感してもらう。</a:t>
             </a:r>
           </a:p>
           <a:p/>
           <a:p>
             <a:r>
-              <a:t>私は友人に、「それ、配送できるよ」と伝えました。</a:t>
-            </a:r>
-          </a:p>
-          <a:p>
-            <a:r>
-              <a:t>買った商品は持ち歩かなくていい。あとで届けてもらえばいい。</a:t>
-            </a:r>
-          </a:p>
-          <a:p>
-            <a:r>
-              <a:t>すると友人は、その場で購入を決めました。金額は――約50万円です。</a:t>
-            </a:r>
-          </a:p>
-          <a:p>
-            <a:r>
-              <a:t>（数字を見てもらうために、3秒ほど間を取る）</a:t>
-            </a:r>
-          </a:p>
-          <a:p>
-            <a:r>
-              <a:t>ポイントは、友人が値引きを求めたわけでも、私が説得したわけでもない、ということです。変わったのは、たったひとつ。「持たなくていい」という選択肢が、その場で示されたことだけでした。</a:t>
-            </a:r>
-          </a:p>
-          <a:p>
-            <a:r>
-              <a:t>もちろん、これは私の個人的な体験で、たった1件のお話です。これをもって「配送をご案内すれば売上が何％上がる」と言うつもりはありません。</a:t>
-            </a:r>
-          </a:p>
-          <a:p>
-            <a:r>
-              <a:t>ただ、このとき私は、はっきりと感じました。</a:t>
-            </a:r>
-          </a:p>
-          <a:p>
-            <a:r>
-              <a:t>これは配送の話ではなく、消費の話だと思ったんです。</a:t>
-            </a:r>
-          </a:p>
-          <a:p>
-            <a:r>
-              <a:t>物流を購入体験の中に組み込むことで、「買いたい」という気持ちを最後まで後押しできる。その可能性は十分にある、と考えています。</a:t>
+              <a:t>先日、友人とPARCOで買い物をしていたときのことです。</a:t>
+            </a:r>
+          </a:p>
+          <a:p>
+            <a:r>
+              <a:t>友人が、とても気に入った商品を見つけました。手に取って、鏡の前で合わせてみて、明らかに欲しそうにしている。</a:t>
+            </a:r>
+          </a:p>
+          <a:p>
+            <a:r>
+              <a:t>ところが、少し考えてから、「やっぱり、やめておこうかな」と言うんです。</a:t>
+            </a:r>
+          </a:p>
+          <a:p>
+            <a:r>
+              <a:t>理由を聞くと、「このあと会食があるから、これを持って移動したくない」と。</a:t>
+            </a:r>
+          </a:p>
+          <a:p>
+            <a:r>
+              <a:t>これは、とても象徴的だと思いました。商品が気に入らなかったわけではない。値段で迷ったわけでもない。ただ、「持ちたくない」。それだけで、買い物が止まりかけていたんです。</a:t>
+            </a:r>
+          </a:p>
+          <a:p>
+            <a:r>
+              <a:t>訪日旅行者であれば、なおさらです。このあとも観光が続く。食事の予約もある。ホテルに戻る時間もない。大きな買い物袋を持って歩き回るのは、誰だって避けたいですよね。</a:t>
+            </a:r>
+          </a:p>
+          <a:p>
+            <a:r>
+              <a:t>皆さんの施設でも、同じことが毎日起きているかもしれません。売り場で手に取られたのに、レジまで来なかった商品。その中には、「持ちたくない」という理由で諦められたものが、きっと含まれているはずです。しかもそれは、売上のデータには残りません。買わなかった理由は、どこにも記録されないからです。</a:t>
+            </a:r>
+          </a:p>
+          <a:p>
+            <a:r>
+              <a:t>つまり、荷物を持ちたくないという気持ちは、旅行の不便であると同時に、「購買機会の損失」でもあるんです。</a:t>
             </a:r>
           </a:p>
           <a:p/>
           <a:p>
             <a:r>
-              <a:t>◆ 強調：これは配送の話ではなく、消費の話だと思ったんです。</a:t>
+              <a:t>◆ 強調：欲しくないのではない。持ちたくないだけ。</a:t>
             </a:r>
           </a:p>
           <a:p/>
           <a:p>
             <a:r>
-              <a:t>→ つなぎ：「では、これを商業施設や免税の現場に置き換えると、どうなるでしょうか。」</a:t>
+              <a:t>→ つなぎ：金額にはまだ触れない。「では、そのとき私が友人に何を伝えたか。」と一拍おいて次へ。</a:t>
             </a:r>
           </a:p>
         </p:txBody>
@@ -1232,60 +1198,65 @@
           <a:lstStyle/>
           <a:p>
             <a:r>
-              <a:t>［2分］商業施設では「購入時」が荷物を手放す接点であることを示し、免税・決済・物流を一連の購買体験として設計する提案をする。</a:t>
+              <a:t>［1分30秒］物流を購入体験に組み込むと購買を後押しできる可能性を、1件の実体験として誠実に示す。講演の転換点。</a:t>
             </a:r>
           </a:p>
           <a:p/>
           <a:p>
             <a:r>
-              <a:t>ホテルでは、チェックアウトが荷物を手放す自然なタイミングでした。</a:t>
-            </a:r>
-          </a:p>
-          <a:p>
-            <a:r>
-              <a:t>商業施設で、それに当たるのが「購入の瞬間」です。</a:t>
-            </a:r>
-          </a:p>
-          <a:p>
-            <a:r>
-              <a:t>レジで、あるいは免税カウンターで、「この商品はホテルにお届けできます」とご案内できたら。お客様は買った商品をその場で手放して、そのまま次の観光や食事へ、手ぶらで向かえます。商品は物流ネットワークを通じて、ホテルなどの受取先に届きます。</a:t>
-            </a:r>
-          </a:p>
-          <a:p>
-            <a:r>
-              <a:t>つまり、「買う」と「持つ」を分離する、ということです。</a:t>
-            </a:r>
-          </a:p>
-          <a:p>
-            <a:r>
-              <a:t>お店にとっても意味があります。大きな商品、重い商品、割れやすい商品。これまで旅行者には勧めにくかったものも、自信を持ってご提案できるようになります。</a:t>
-            </a:r>
-          </a:p>
-          <a:p>
-            <a:r>
-              <a:t>ちょうど今、免税制度は大きな変化の時期を迎えています。この変化を、免税の手続きをどう変えるか、だけで終わらせるのはもったいない。購入した後の体験そのものを見直すきっかけにできるはずです。</a:t>
-            </a:r>
-          </a:p>
-          <a:p>
-            <a:r>
-              <a:t>免税、決済、そして物流。この3つを別々の仕組みとしてではなく、ひとつながりの購買体験として設計する。商業施設や免税に携わる皆さんと、ぜひご一緒に考えたいテーマです。</a:t>
-            </a:r>
-          </a:p>
-          <a:p>
-            <a:r>
-              <a:t>空港での受け取りなど、制度や運用の整理が必要な部分は、まだあります。そこはこれから、皆さんと一緒に詰めていきたいと思っています。</a:t>
+              <a:t>私は友人に、「それ、配送できるよ」と伝えました。</a:t>
+            </a:r>
+          </a:p>
+          <a:p>
+            <a:r>
+              <a:t>買った商品は持ち歩かなくていい。あとで届けてもらえばいい。</a:t>
+            </a:r>
+          </a:p>
+          <a:p>
+            <a:r>
+              <a:t>すると友人は、その場で購入を決めました。金額は――約50万円です。</a:t>
+            </a:r>
+          </a:p>
+          <a:p>
+            <a:r>
+              <a:t>（数字を見てもらうために、3秒ほど間を取る）</a:t>
+            </a:r>
+          </a:p>
+          <a:p>
+            <a:r>
+              <a:t>ポイントは、友人が値引きを求めたわけでも、私が説得したわけでもない、ということです。変わったのは、たったひとつ。「持たなくていい」という選択肢が、その場で示されたことだけでした。</a:t>
+            </a:r>
+          </a:p>
+          <a:p>
+            <a:r>
+              <a:t>もちろん、これは私の個人的な体験で、たった1件のお話です。これをもって「配送をご案内すれば売上が何％上がる」と言うつもりはありません。</a:t>
+            </a:r>
+          </a:p>
+          <a:p>
+            <a:r>
+              <a:t>ただ、このとき私は、はっきりと感じました。</a:t>
+            </a:r>
+          </a:p>
+          <a:p>
+            <a:r>
+              <a:t>これは配送の話ではなく、消費の話だと思ったんです。</a:t>
+            </a:r>
+          </a:p>
+          <a:p>
+            <a:r>
+              <a:t>物流を購入体験の中に組み込むことで、「買いたい」という気持ちを最後まで後押しできる。その可能性は十分にある、と考えています。</a:t>
             </a:r>
           </a:p>
           <a:p/>
           <a:p>
             <a:r>
-              <a:t>◆ 強調：「買う」と「持つ」を、分離する。</a:t>
+              <a:t>◆ 強調：これは配送の話ではなく、消費の話だと思ったんです。</a:t>
             </a:r>
           </a:p>
           <a:p/>
           <a:p>
             <a:r>
-              <a:t>→ つなぎ：「最後に、私たちが目指している姿をお話しして、終わりたいと思います。」</a:t>
+              <a:t>→ つなぎ：「では、これを商業施設や免税の現場に置き換えると、どうなるでしょうか。」</a:t>
             </a:r>
           </a:p>
         </p:txBody>
@@ -1311,6 +1282,129 @@
 </file>
 
 <file path=ppt/notesSlides/notesSlide8.xml><?xml version="1.0" encoding="utf-8"?>
+<p:notes xmlns:a="http://schemas.openxmlformats.org/drawingml/2006/main" xmlns:p="http://schemas.openxmlformats.org/presentationml/2006/main" xmlns:r="http://schemas.openxmlformats.org/officeDocument/2006/relationships">
+  <p:cSld>
+    <p:spTree>
+      <p:nvGrpSpPr>
+        <p:cNvPr id="1" name=""/>
+        <p:cNvGrpSpPr/>
+        <p:nvPr/>
+      </p:nvGrpSpPr>
+      <p:grpSpPr>
+        <a:xfrm>
+          <a:off x="0" y="0"/>
+          <a:ext cx="0" cy="0"/>
+          <a:chOff x="0" y="0"/>
+          <a:chExt cx="0" cy="0"/>
+        </a:xfrm>
+      </p:grpSpPr>
+      <p:sp>
+        <p:nvSpPr>
+          <p:cNvPr id="2" name="Slide Image Placeholder 1"/>
+          <p:cNvSpPr>
+            <a:spLocks noGrp="1"/>
+          </p:cNvSpPr>
+          <p:nvPr>
+            <p:ph type="sldImg" idx="2"/>
+          </p:nvPr>
+        </p:nvSpPr>
+        <p:spPr/>
+      </p:sp>
+      <p:sp>
+        <p:nvSpPr>
+          <p:cNvPr id="3" name="Notes Placeholder 2"/>
+          <p:cNvSpPr>
+            <a:spLocks noGrp="1"/>
+          </p:cNvSpPr>
+          <p:nvPr>
+            <p:ph type="body" idx="3" sz="quarter"/>
+          </p:nvPr>
+        </p:nvSpPr>
+        <p:spPr/>
+        <p:txBody>
+          <a:bodyPr/>
+          <a:lstStyle/>
+          <a:p>
+            <a:r>
+              <a:t>［2分］商業施設では「購入時」が荷物を手放す接点であることを示し、免税・決済・物流を一連の購買体験として設計する提案をする。</a:t>
+            </a:r>
+          </a:p>
+          <a:p/>
+          <a:p>
+            <a:r>
+              <a:t>ホテルでは、チェックアウトが荷物を手放す自然なタイミングでした。</a:t>
+            </a:r>
+          </a:p>
+          <a:p>
+            <a:r>
+              <a:t>商業施設で、それに当たるのが「購入の瞬間」です。</a:t>
+            </a:r>
+          </a:p>
+          <a:p>
+            <a:r>
+              <a:t>レジで、あるいは免税カウンターで、「この商品はホテルにお届けできます」とご案内できたら。お客様は買った商品をその場で手放して、そのまま次の観光や食事へ、手ぶらで向かえます。商品は物流ネットワークを通じて、ホテルなどの受取先に届きます。</a:t>
+            </a:r>
+          </a:p>
+          <a:p>
+            <a:r>
+              <a:t>つまり、「買う」と「持つ」を分離する、ということです。</a:t>
+            </a:r>
+          </a:p>
+          <a:p>
+            <a:r>
+              <a:t>お店にとっても意味があります。大きな商品、重い商品、割れやすい商品。これまで旅行者には勧めにくかったものも、自信を持ってご提案できるようになります。</a:t>
+            </a:r>
+          </a:p>
+          <a:p>
+            <a:r>
+              <a:t>ちょうど今、免税制度は大きな変化の時期を迎えています。この変化を、免税の手続きをどう変えるか、だけで終わらせるのはもったいない。購入した後の体験そのものを見直すきっかけにできるはずです。</a:t>
+            </a:r>
+          </a:p>
+          <a:p>
+            <a:r>
+              <a:t>免税、決済、そして物流。この3つを別々の仕組みとしてではなく、ひとつながりの購買体験として設計する。商業施設や免税に携わる皆さんと、ぜひご一緒に考えたいテーマです。</a:t>
+            </a:r>
+          </a:p>
+          <a:p>
+            <a:r>
+              <a:t>空港での受け取りなど、制度や運用の整理が必要な部分は、まだあります。そこはこれから、皆さんと一緒に詰めていきたいと思っています。</a:t>
+            </a:r>
+          </a:p>
+          <a:p/>
+          <a:p>
+            <a:r>
+              <a:t>◆ 強調：「買う」と「持つ」を、分離する。</a:t>
+            </a:r>
+          </a:p>
+          <a:p/>
+          <a:p>
+            <a:r>
+              <a:t>→ つなぎ：「最後に、私たちが目指している姿をお話しして、終わりたいと思います。」</a:t>
+            </a:r>
+          </a:p>
+        </p:txBody>
+      </p:sp>
+      <p:sp>
+        <p:nvSpPr>
+          <p:cNvPr id="4" name="Slide Number Placeholder 3"/>
+          <p:cNvSpPr>
+            <a:spLocks noGrp="1"/>
+          </p:cNvSpPr>
+          <p:nvPr>
+            <p:ph type="sldNum" idx="5" sz="quarter"/>
+          </p:nvPr>
+        </p:nvSpPr>
+        <p:spPr/>
+      </p:sp>
+    </p:spTree>
+  </p:cSld>
+  <p:clrMapOvr>
+    <a:masterClrMapping/>
+  </p:clrMapOvr>
+</p:notes>
+</file>
+
+<file path=ppt/notesSlides/notesSlide9.xml><?xml version="1.0" encoding="utf-8"?>
 <p:notes xmlns:a="http://schemas.openxmlformats.org/drawingml/2006/main" xmlns:p="http://schemas.openxmlformats.org/presentationml/2006/main" xmlns:r="http://schemas.openxmlformats.org/officeDocument/2006/relationships">
   <p:cSld>
     <p:spTree>
@@ -4429,6 +4523,241 @@
       <p:grpSpPr/>
       <p:pic>
         <p:nvPicPr>
+          <p:cNvPr id="2" name="BondEx ロゴ" descr="bondex-logo-white.png"/>
+          <p:cNvPicPr>
+            <a:picLocks noChangeAspect="1"/>
+          </p:cNvPicPr>
+          <p:nvPr/>
+        </p:nvPicPr>
+        <p:blipFill>
+          <a:blip r:embed="rId2"/>
+          <a:stretch>
+            <a:fillRect/>
+          </a:stretch>
+        </p:blipFill>
+        <p:spPr>
+          <a:xfrm>
+            <a:off x="812800" y="736600"/>
+            <a:ext cx="1874639" cy="330200"/>
+          </a:xfrm>
+          <a:prstGeom prst="rect">
+            <a:avLst/>
+          </a:prstGeom>
+        </p:spPr>
+      </p:pic>
+      <p:sp>
+        <p:nvSpPr>
+          <p:cNvPr id="3" name="見出し"/>
+          <p:cNvSpPr txBox="1"/>
+          <p:nvPr/>
+        </p:nvSpPr>
+        <p:spPr>
+          <a:xfrm>
+            <a:off x="482600" y="1855470"/>
+            <a:ext cx="10314980" cy="1875433"/>
+          </a:xfrm>
+          <a:prstGeom prst="rect">
+            <a:avLst/>
+          </a:prstGeom>
+          <a:noFill/>
+        </p:spPr>
+        <p:txBody>
+          <a:bodyPr wrap="none" lIns="0" rIns="0" tIns="0" bIns="0" anchor="t"/>
+          <a:lstStyle/>
+          <a:p>
+            <a:pPr algn="l" marL="330200">
+              <a:lnSpc>
+                <a:spcPts val="7384"/>
+              </a:lnSpc>
+              <a:spcBef>
+                <a:spcPts val="0"/>
+              </a:spcBef>
+              <a:spcAft>
+                <a:spcPts val="0"/>
+              </a:spcAft>
+            </a:pPr>
+            <a:r>
+              <a:rPr sz="5200" b="0" spc="-52" lang="ja-JP" altLang="en-US">
+                <a:solidFill>
+                  <a:srgbClr val="FFFFFF"/>
+                </a:solidFill>
+                <a:latin typeface="Noto Sans JP Medium"/>
+                <a:ea typeface="Noto Sans JP Medium"/>
+                <a:cs typeface="Noto Sans JP Medium"/>
+              </a:rPr>
+              <a:t>日本旅行から、</a:t>
+            </a:r>
+          </a:p>
+          <a:p>
+            <a:pPr algn="l">
+              <a:lnSpc>
+                <a:spcPts val="7384"/>
+              </a:lnSpc>
+              <a:spcBef>
+                <a:spcPts val="0"/>
+              </a:spcBef>
+              <a:spcAft>
+                <a:spcPts val="0"/>
+              </a:spcAft>
+            </a:pPr>
+            <a:r>
+              <a:rPr sz="5200" b="0" spc="-52" lang="ja-JP" altLang="en-US">
+                <a:solidFill>
+                  <a:srgbClr val="FFFFFF"/>
+                </a:solidFill>
+                <a:latin typeface="Noto Sans JP Medium"/>
+                <a:ea typeface="Noto Sans JP Medium"/>
+                <a:cs typeface="Noto Sans JP Medium"/>
+              </a:rPr>
+              <a:t>「自分で荷物を運ぶ」をなくす。</a:t>
+            </a:r>
+          </a:p>
+        </p:txBody>
+      </p:sp>
+      <p:sp>
+        <p:nvSpPr>
+          <p:cNvPr id="4" name="タグライン"/>
+          <p:cNvSpPr txBox="1"/>
+          <p:nvPr/>
+        </p:nvSpPr>
+        <p:spPr>
+          <a:xfrm>
+            <a:off x="812800" y="4067044"/>
+            <a:ext cx="4809728" cy="252412"/>
+          </a:xfrm>
+          <a:prstGeom prst="rect">
+            <a:avLst/>
+          </a:prstGeom>
+          <a:noFill/>
+        </p:spPr>
+        <p:txBody>
+          <a:bodyPr wrap="none" lIns="0" rIns="0" tIns="0" bIns="0" anchor="t"/>
+          <a:lstStyle/>
+          <a:p>
+            <a:pPr>
+              <a:lnSpc>
+                <a:spcPts val="1988"/>
+              </a:lnSpc>
+              <a:spcBef>
+                <a:spcPts val="0"/>
+              </a:spcBef>
+              <a:spcAft>
+                <a:spcPts val="0"/>
+              </a:spcAft>
+            </a:pPr>
+            <a:r>
+              <a:rPr sz="1400" b="0" spc="280" lang="ja-JP" altLang="en-US">
+                <a:solidFill>
+                  <a:srgbClr val="A3A3A3"/>
+                </a:solidFill>
+                <a:latin typeface="Inter SemiBold"/>
+                <a:ea typeface="Inter SemiBold"/>
+                <a:cs typeface="Inter SemiBold"/>
+              </a:rPr>
+              <a:t>TRAVEL LIGHTER. TRAVEL FURTHER.</a:t>
+            </a:r>
+          </a:p>
+        </p:txBody>
+      </p:sp>
+      <p:pic>
+        <p:nvPicPr>
+          <p:cNvPr id="5" name="QRコード（https://bondex.express）" descr="qr-bondex-express.png">
+            <a:hlinkClick r:id="rId4"/>
+          </p:cNvPr>
+          <p:cNvPicPr>
+            <a:picLocks noChangeAspect="1"/>
+          </p:cNvPicPr>
+          <p:nvPr/>
+        </p:nvPicPr>
+        <p:blipFill>
+          <a:blip r:embed="rId3"/>
+          <a:stretch>
+            <a:fillRect/>
+          </a:stretch>
+        </p:blipFill>
+        <p:spPr>
+          <a:xfrm>
+            <a:off x="9474200" y="4216400"/>
+            <a:ext cx="1905000" cy="1905000"/>
+          </a:xfrm>
+          <a:prstGeom prst="rect">
+            <a:avLst/>
+          </a:prstGeom>
+        </p:spPr>
+      </p:pic>
+      <p:sp>
+        <p:nvSpPr>
+          <p:cNvPr id="6" name="QRの説明"/>
+          <p:cNvSpPr txBox="1"/>
+          <p:nvPr/>
+        </p:nvSpPr>
+        <p:spPr>
+          <a:xfrm>
+            <a:off x="5461000" y="5893574"/>
+            <a:ext cx="3810000" cy="216396"/>
+          </a:xfrm>
+          <a:prstGeom prst="rect">
+            <a:avLst/>
+          </a:prstGeom>
+          <a:noFill/>
+        </p:spPr>
+        <p:txBody>
+          <a:bodyPr wrap="none" lIns="0" rIns="0" tIns="0" bIns="0" anchor="t"/>
+          <a:lstStyle/>
+          <a:p>
+            <a:pPr algn="r">
+              <a:lnSpc>
+                <a:spcPts val="1704"/>
+              </a:lnSpc>
+              <a:spcBef>
+                <a:spcPts val="0"/>
+              </a:spcBef>
+              <a:spcAft>
+                <a:spcPts val="0"/>
+              </a:spcAft>
+            </a:pPr>
+            <a:r>
+              <a:rPr sz="1200" b="0" lang="ja-JP" altLang="en-US">
+                <a:solidFill>
+                  <a:srgbClr val="A3A3A3"/>
+                </a:solidFill>
+                <a:latin typeface="Noto Sans JP"/>
+                <a:ea typeface="Noto Sans JP"/>
+                <a:cs typeface="Noto Sans JP"/>
+              </a:rPr>
+              <a:t>BondEx 公式サイト</a:t>
+            </a:r>
+          </a:p>
+        </p:txBody>
+      </p:sp>
+    </p:spTree>
+  </p:cSld>
+  <p:clrMapOvr>
+    <a:masterClrMapping/>
+  </p:clrMapOvr>
+</p:sld>
+</file>
+
+<file path=ppt/slides/slide2.xml><?xml version="1.0" encoding="utf-8"?>
+<p:sld xmlns:a="http://schemas.openxmlformats.org/drawingml/2006/main" xmlns:p="http://schemas.openxmlformats.org/presentationml/2006/main" xmlns:r="http://schemas.openxmlformats.org/officeDocument/2006/relationships">
+  <p:cSld>
+    <p:bg>
+      <p:bgPr>
+        <a:solidFill>
+          <a:srgbClr val="0A0A0A"/>
+        </a:solidFill>
+        <a:effectLst/>
+      </p:bgPr>
+    </p:bg>
+    <p:spTree>
+      <p:nvGrpSpPr>
+        <p:cNvPr id="1" name=""/>
+        <p:cNvGrpSpPr/>
+        <p:nvPr/>
+      </p:nvGrpSpPr>
+      <p:grpSpPr/>
+      <p:pic>
+        <p:nvPicPr>
           <p:cNvPr id="2" name="写真（右クリック→図の変更で差し替え）" descr="s01.jpg"/>
           <p:cNvPicPr>
             <a:picLocks noChangeAspect="1"/>
@@ -4591,7 +4920,7 @@
 </p:sld>
 </file>
 
-<file path=ppt/slides/slide2.xml><?xml version="1.0" encoding="utf-8"?>
+<file path=ppt/slides/slide3.xml><?xml version="1.0" encoding="utf-8"?>
 <p:sld xmlns:a="http://schemas.openxmlformats.org/drawingml/2006/main" xmlns:p="http://schemas.openxmlformats.org/presentationml/2006/main" xmlns:r="http://schemas.openxmlformats.org/officeDocument/2006/relationships">
   <p:cSld>
     <p:bg>
@@ -4762,7 +5091,7 @@
 </p:sld>
 </file>
 
-<file path=ppt/slides/slide3.xml><?xml version="1.0" encoding="utf-8"?>
+<file path=ppt/slides/slide4.xml><?xml version="1.0" encoding="utf-8"?>
 <p:sld xmlns:a="http://schemas.openxmlformats.org/drawingml/2006/main" xmlns:p="http://schemas.openxmlformats.org/presentationml/2006/main" xmlns:r="http://schemas.openxmlformats.org/officeDocument/2006/relationships">
   <p:cSld>
     <p:bg>
@@ -4933,7 +5262,7 @@
 </p:sld>
 </file>
 
-<file path=ppt/slides/slide4.xml><?xml version="1.0" encoding="utf-8"?>
+<file path=ppt/slides/slide5.xml><?xml version="1.0" encoding="utf-8"?>
 <p:sld xmlns:a="http://schemas.openxmlformats.org/drawingml/2006/main" xmlns:p="http://schemas.openxmlformats.org/presentationml/2006/main" xmlns:r="http://schemas.openxmlformats.org/officeDocument/2006/relationships">
   <p:cSld>
     <p:bg>
@@ -5960,7 +6289,7 @@
 </p:sld>
 </file>
 
-<file path=ppt/slides/slide5.xml><?xml version="1.0" encoding="utf-8"?>
+<file path=ppt/slides/slide6.xml><?xml version="1.0" encoding="utf-8"?>
 <p:sld xmlns:a="http://schemas.openxmlformats.org/drawingml/2006/main" xmlns:p="http://schemas.openxmlformats.org/presentationml/2006/main" xmlns:r="http://schemas.openxmlformats.org/officeDocument/2006/relationships">
   <p:cSld>
     <p:bg>
@@ -6131,7 +6460,7 @@
 </p:sld>
 </file>
 
-<file path=ppt/slides/slide6.xml><?xml version="1.0" encoding="utf-8"?>
+<file path=ppt/slides/slide7.xml><?xml version="1.0" encoding="utf-8"?>
 <p:sld xmlns:a="http://schemas.openxmlformats.org/drawingml/2006/main" xmlns:p="http://schemas.openxmlformats.org/presentationml/2006/main" xmlns:r="http://schemas.openxmlformats.org/officeDocument/2006/relationships">
   <p:cSld>
     <p:bg>
@@ -6454,7 +6783,7 @@
 </p:sld>
 </file>
 
-<file path=ppt/slides/slide7.xml><?xml version="1.0" encoding="utf-8"?>
+<file path=ppt/slides/slide8.xml><?xml version="1.0" encoding="utf-8"?>
 <p:sld xmlns:a="http://schemas.openxmlformats.org/drawingml/2006/main" xmlns:p="http://schemas.openxmlformats.org/presentationml/2006/main" xmlns:r="http://schemas.openxmlformats.org/officeDocument/2006/relationships">
   <p:cSld>
     <p:bg>
@@ -6625,7 +6954,7 @@
 </p:sld>
 </file>
 
-<file path=ppt/slides/slide8.xml><?xml version="1.0" encoding="utf-8"?>
+<file path=ppt/slides/slide9.xml><?xml version="1.0" encoding="utf-8"?>
 <p:sld xmlns:a="http://schemas.openxmlformats.org/drawingml/2006/main" xmlns:p="http://schemas.openxmlformats.org/presentationml/2006/main" xmlns:r="http://schemas.openxmlformats.org/officeDocument/2006/relationships">
   <p:cSld>
     <p:bg>

--- a/docs/collateral/seminar-luggage/out/BondEx_Seminar_Final.pptx
+++ b/docs/collateral/seminar-luggage/out/BondEx_Seminar_Final.pptx
@@ -4523,7 +4523,7 @@
       <p:grpSpPr/>
       <p:pic>
         <p:nvPicPr>
-          <p:cNvPr id="2" name="BondEx ロゴ" descr="bondex-logo-white.png"/>
+          <p:cNvPr id="2" name="BondEx ロゴ" descr="bondex-logo-red.png"/>
           <p:cNvPicPr>
             <a:picLocks noChangeAspect="1"/>
           </p:cNvPicPr>
@@ -7119,7 +7119,7 @@
       </p:sp>
       <p:pic>
         <p:nvPicPr>
-          <p:cNvPr id="5" name="BondEx ロゴ" descr="bondex-logo-white.png"/>
+          <p:cNvPr id="5" name="BondEx ロゴ" descr="bondex-logo-red.png"/>
           <p:cNvPicPr>
             <a:picLocks noChangeAspect="1"/>
           </p:cNvPicPr>

--- a/docs/collateral/seminar-luggage/out/BondEx_Seminar_Final.pptx
+++ b/docs/collateral/seminar-luggage/out/BondEx_Seminar_Final.pptx
@@ -609,7 +609,7 @@
           <a:p/>
           <a:p>
             <a:r>
-              <a:t>皆さん、こんにちは。BondExの［氏名］です。今日は15分ほど、「荷物」のお話をさせてください。</a:t>
+              <a:t>皆さん、こんにちは。株式会社JOJO、BondExの谷口です。今日は15分ほど、「荷物」のお話をさせてください。</a:t>
             </a:r>
           </a:p>
           <a:p>
@@ -4687,7 +4687,97 @@
       </p:pic>
       <p:sp>
         <p:nvSpPr>
-          <p:cNvPr id="6" name="QRの説明"/>
+          <p:cNvPr id="6" name="登壇者"/>
+          <p:cNvSpPr txBox="1"/>
+          <p:nvPr/>
+        </p:nvSpPr>
+        <p:spPr>
+          <a:xfrm>
+            <a:off x="812800" y="5452586"/>
+            <a:ext cx="2880916" cy="234355"/>
+          </a:xfrm>
+          <a:prstGeom prst="rect">
+            <a:avLst/>
+          </a:prstGeom>
+          <a:noFill/>
+        </p:spPr>
+        <p:txBody>
+          <a:bodyPr wrap="none" lIns="0" rIns="0" tIns="0" bIns="0" anchor="t"/>
+          <a:lstStyle/>
+          <a:p>
+            <a:pPr>
+              <a:lnSpc>
+                <a:spcPts val="1846"/>
+              </a:lnSpc>
+              <a:spcBef>
+                <a:spcPts val="0"/>
+              </a:spcBef>
+              <a:spcAft>
+                <a:spcPts val="0"/>
+              </a:spcAft>
+            </a:pPr>
+            <a:r>
+              <a:rPr sz="1300" b="0" spc="26" lang="ja-JP" altLang="en-US">
+                <a:solidFill>
+                  <a:srgbClr val="A3A3A3"/>
+                </a:solidFill>
+                <a:latin typeface="Noto Sans JP"/>
+                <a:ea typeface="Noto Sans JP"/>
+                <a:cs typeface="Noto Sans JP"/>
+              </a:rPr>
+              <a:t>株式会社JOJO　代表取締役</a:t>
+            </a:r>
+          </a:p>
+        </p:txBody>
+      </p:sp>
+      <p:sp>
+        <p:nvSpPr>
+          <p:cNvPr id="7" name="登壇者"/>
+          <p:cNvSpPr txBox="1"/>
+          <p:nvPr/>
+        </p:nvSpPr>
+        <p:spPr>
+          <a:xfrm>
+            <a:off x="812800" y="5703768"/>
+            <a:ext cx="2880916" cy="396677"/>
+          </a:xfrm>
+          <a:prstGeom prst="rect">
+            <a:avLst/>
+          </a:prstGeom>
+          <a:noFill/>
+        </p:spPr>
+        <p:txBody>
+          <a:bodyPr wrap="none" lIns="0" rIns="0" tIns="0" bIns="0" anchor="t"/>
+          <a:lstStyle/>
+          <a:p>
+            <a:pPr>
+              <a:lnSpc>
+                <a:spcPts val="3124"/>
+              </a:lnSpc>
+              <a:spcBef>
+                <a:spcPts val="0"/>
+              </a:spcBef>
+              <a:spcAft>
+                <a:spcPts val="0"/>
+              </a:spcAft>
+            </a:pPr>
+            <a:r>
+              <a:rPr sz="2200" b="0" spc="132" lang="ja-JP" altLang="en-US">
+                <a:solidFill>
+                  <a:srgbClr val="FFFFFF"/>
+                </a:solidFill>
+                <a:latin typeface="Noto Sans JP Medium"/>
+                <a:ea typeface="Noto Sans JP Medium"/>
+                <a:cs typeface="Noto Sans JP Medium"/>
+              </a:rPr>
+              <a:t>谷口琢真</a:t>
+            </a:r>
+          </a:p>
+        </p:txBody>
+      </p:sp>
+      <p:sp>
+        <p:nvSpPr>
+          <p:cNvPr id="8" name="QRの説明"/>
           <p:cNvSpPr txBox="1"/>
           <p:nvPr/>
         </p:nvSpPr>
